--- a/S1-CL2-Cloud-Disaster-Recovery/delivery/topic_10/Topic_10_Slides.pptx
+++ b/S1-CL2-Cloud-Disaster-Recovery/delivery/topic_10/Topic_10_Slides.pptx
@@ -3678,7 +3678,7 @@
           <a:noFill/>
         </p:spPr>
         <p:txBody>
-          <a:bodyPr wrap="square" anchor="t" lIns="0" rIns="0" tIns="0" bIns="0">
+          <a:bodyPr wrap="square" anchor="ctr" lIns="0" rIns="0" tIns="0" bIns="0">
             <a:spAutoFit/>
           </a:bodyPr>
           <a:lstStyle/>
@@ -3695,7 +3695,7 @@
               </a:spcAft>
             </a:pPr>
             <a:r>
-              <a:rPr sz="1800" b="1" i="0">
+              <a:rPr sz="2400" b="1" i="0">
                 <a:solidFill>
                   <a:srgbClr val="EDAB0C"/>
                 </a:solidFill>
@@ -3704,7 +3704,7 @@
               <a:t>■  </a:t>
             </a:r>
             <a:r>
-              <a:rPr sz="1800" b="0" i="0">
+              <a:rPr sz="2400" b="0" i="0">
                 <a:solidFill>
                   <a:srgbClr val="2A2929"/>
                 </a:solidFill>
@@ -3726,7 +3726,7 @@
               </a:spcAft>
             </a:pPr>
             <a:r>
-              <a:rPr sz="1800" b="1" i="0">
+              <a:rPr sz="2400" b="1" i="0">
                 <a:solidFill>
                   <a:srgbClr val="EDAB0C"/>
                 </a:solidFill>
@@ -3735,7 +3735,7 @@
               <a:t>■  </a:t>
             </a:r>
             <a:r>
-              <a:rPr sz="1800" b="0" i="0">
+              <a:rPr sz="2400" b="0" i="0">
                 <a:solidFill>
                   <a:srgbClr val="2A2929"/>
                 </a:solidFill>
@@ -3757,7 +3757,7 @@
               </a:spcAft>
             </a:pPr>
             <a:r>
-              <a:rPr sz="1800" b="1" i="0">
+              <a:rPr sz="2400" b="1" i="0">
                 <a:solidFill>
                   <a:srgbClr val="EDAB0C"/>
                 </a:solidFill>
@@ -3766,7 +3766,7 @@
               <a:t>■  </a:t>
             </a:r>
             <a:r>
-              <a:rPr sz="1800" b="0" i="0">
+              <a:rPr sz="2400" b="0" i="0">
                 <a:solidFill>
                   <a:srgbClr val="2A2929"/>
                 </a:solidFill>
@@ -4725,7 +4725,7 @@
           <a:noFill/>
         </p:spPr>
         <p:txBody>
-          <a:bodyPr wrap="square" anchor="t" lIns="0" rIns="0" tIns="0" bIns="0">
+          <a:bodyPr wrap="square" anchor="ctr" lIns="0" rIns="0" tIns="0" bIns="0">
             <a:spAutoFit/>
           </a:bodyPr>
           <a:lstStyle/>
@@ -4742,7 +4742,7 @@
               </a:spcAft>
             </a:pPr>
             <a:r>
-              <a:rPr sz="1800" b="1" i="0">
+              <a:rPr sz="2400" b="1" i="0">
                 <a:solidFill>
                   <a:srgbClr val="EDAB0C"/>
                 </a:solidFill>
@@ -4751,7 +4751,7 @@
               <a:t>■  </a:t>
             </a:r>
             <a:r>
-              <a:rPr sz="1800" b="0" i="0">
+              <a:rPr sz="2400" b="0" i="0">
                 <a:solidFill>
                   <a:srgbClr val="2A2929"/>
                 </a:solidFill>
@@ -4773,7 +4773,7 @@
               </a:spcAft>
             </a:pPr>
             <a:r>
-              <a:rPr sz="1800" b="1" i="0">
+              <a:rPr sz="2400" b="1" i="0">
                 <a:solidFill>
                   <a:srgbClr val="EDAB0C"/>
                 </a:solidFill>
@@ -4782,7 +4782,7 @@
               <a:t>■  </a:t>
             </a:r>
             <a:r>
-              <a:rPr sz="1800" b="0" i="0">
+              <a:rPr sz="2400" b="0" i="0">
                 <a:solidFill>
                   <a:srgbClr val="2A2929"/>
                 </a:solidFill>
@@ -4804,7 +4804,7 @@
               </a:spcAft>
             </a:pPr>
             <a:r>
-              <a:rPr sz="1800" b="1" i="0">
+              <a:rPr sz="2400" b="1" i="0">
                 <a:solidFill>
                   <a:srgbClr val="EDAB0C"/>
                 </a:solidFill>
@@ -4813,7 +4813,7 @@
               <a:t>■  </a:t>
             </a:r>
             <a:r>
-              <a:rPr sz="1800" b="0" i="0">
+              <a:rPr sz="2400" b="0" i="0">
                 <a:solidFill>
                   <a:srgbClr val="2A2929"/>
                 </a:solidFill>
@@ -7069,7 +7069,7 @@
           <a:noFill/>
         </p:spPr>
         <p:txBody>
-          <a:bodyPr wrap="square" anchor="t" lIns="0" rIns="0" tIns="0" bIns="0">
+          <a:bodyPr wrap="square" anchor="ctr" lIns="0" rIns="0" tIns="0" bIns="0">
             <a:spAutoFit/>
           </a:bodyPr>
           <a:lstStyle/>
@@ -7086,7 +7086,7 @@
               </a:spcAft>
             </a:pPr>
             <a:r>
-              <a:rPr sz="1800" b="1" i="0">
+              <a:rPr sz="2400" b="1" i="0">
                 <a:solidFill>
                   <a:srgbClr val="EDAB0C"/>
                 </a:solidFill>
@@ -7095,7 +7095,7 @@
               <a:t>■  </a:t>
             </a:r>
             <a:r>
-              <a:rPr sz="1800" b="0" i="0">
+              <a:rPr sz="2400" b="0" i="0">
                 <a:solidFill>
                   <a:srgbClr val="2A2929"/>
                 </a:solidFill>
@@ -7117,7 +7117,7 @@
               </a:spcAft>
             </a:pPr>
             <a:r>
-              <a:rPr sz="1800" b="1" i="0">
+              <a:rPr sz="2400" b="1" i="0">
                 <a:solidFill>
                   <a:srgbClr val="EDAB0C"/>
                 </a:solidFill>
@@ -7126,7 +7126,7 @@
               <a:t>■  </a:t>
             </a:r>
             <a:r>
-              <a:rPr sz="1800" b="0" i="0">
+              <a:rPr sz="2400" b="0" i="0">
                 <a:solidFill>
                   <a:srgbClr val="2A2929"/>
                 </a:solidFill>
@@ -7148,7 +7148,7 @@
               </a:spcAft>
             </a:pPr>
             <a:r>
-              <a:rPr sz="1800" b="1" i="0">
+              <a:rPr sz="2400" b="1" i="0">
                 <a:solidFill>
                   <a:srgbClr val="EDAB0C"/>
                 </a:solidFill>
@@ -7157,7 +7157,7 @@
               <a:t>■  </a:t>
             </a:r>
             <a:r>
-              <a:rPr sz="1800" b="0" i="0">
+              <a:rPr sz="2400" b="0" i="0">
                 <a:solidFill>
                   <a:srgbClr val="2A2929"/>
                 </a:solidFill>
@@ -7411,7 +7411,7 @@
           <a:noFill/>
         </p:spPr>
         <p:txBody>
-          <a:bodyPr wrap="square" anchor="t" lIns="0" rIns="0" tIns="0" bIns="0">
+          <a:bodyPr wrap="square" anchor="ctr" lIns="0" rIns="0" tIns="0" bIns="0">
             <a:spAutoFit/>
           </a:bodyPr>
           <a:lstStyle/>
@@ -7428,7 +7428,7 @@
               </a:spcAft>
             </a:pPr>
             <a:r>
-              <a:rPr sz="1800" b="1" i="0">
+              <a:rPr sz="2400" b="1" i="0">
                 <a:solidFill>
                   <a:srgbClr val="EDAB0C"/>
                 </a:solidFill>
@@ -7437,7 +7437,7 @@
               <a:t>■  </a:t>
             </a:r>
             <a:r>
-              <a:rPr sz="1800" b="0" i="0">
+              <a:rPr sz="2400" b="0" i="0">
                 <a:solidFill>
                   <a:srgbClr val="2A2929"/>
                 </a:solidFill>
@@ -7459,7 +7459,7 @@
               </a:spcAft>
             </a:pPr>
             <a:r>
-              <a:rPr sz="1800" b="1" i="0">
+              <a:rPr sz="2400" b="1" i="0">
                 <a:solidFill>
                   <a:srgbClr val="EDAB0C"/>
                 </a:solidFill>
@@ -7468,7 +7468,7 @@
               <a:t>■  </a:t>
             </a:r>
             <a:r>
-              <a:rPr sz="1800" b="0" i="0">
+              <a:rPr sz="2400" b="0" i="0">
                 <a:solidFill>
                   <a:srgbClr val="2A2929"/>
                 </a:solidFill>
@@ -7490,7 +7490,7 @@
               </a:spcAft>
             </a:pPr>
             <a:r>
-              <a:rPr sz="1800" b="1" i="0">
+              <a:rPr sz="2400" b="1" i="0">
                 <a:solidFill>
                   <a:srgbClr val="EDAB0C"/>
                 </a:solidFill>
@@ -7499,7 +7499,7 @@
               <a:t>■  </a:t>
             </a:r>
             <a:r>
-              <a:rPr sz="1800" b="0" i="0">
+              <a:rPr sz="2400" b="0" i="0">
                 <a:solidFill>
                   <a:srgbClr val="2A2929"/>
                 </a:solidFill>
@@ -8458,7 +8458,7 @@
           <a:noFill/>
         </p:spPr>
         <p:txBody>
-          <a:bodyPr wrap="square" anchor="t" lIns="0" rIns="0" tIns="0" bIns="0">
+          <a:bodyPr wrap="square" anchor="ctr" lIns="0" rIns="0" tIns="0" bIns="0">
             <a:spAutoFit/>
           </a:bodyPr>
           <a:lstStyle/>
@@ -8475,7 +8475,7 @@
               </a:spcAft>
             </a:pPr>
             <a:r>
-              <a:rPr sz="1800" b="1" i="0">
+              <a:rPr sz="2400" b="1" i="0">
                 <a:solidFill>
                   <a:srgbClr val="EDAB0C"/>
                 </a:solidFill>
@@ -8484,7 +8484,7 @@
               <a:t>■  </a:t>
             </a:r>
             <a:r>
-              <a:rPr sz="1800" b="0" i="0">
+              <a:rPr sz="2400" b="0" i="0">
                 <a:solidFill>
                   <a:srgbClr val="2A2929"/>
                 </a:solidFill>
@@ -8506,7 +8506,7 @@
               </a:spcAft>
             </a:pPr>
             <a:r>
-              <a:rPr sz="1800" b="1" i="0">
+              <a:rPr sz="2400" b="1" i="0">
                 <a:solidFill>
                   <a:srgbClr val="EDAB0C"/>
                 </a:solidFill>
@@ -8515,7 +8515,7 @@
               <a:t>■  </a:t>
             </a:r>
             <a:r>
-              <a:rPr sz="1800" b="0" i="0">
+              <a:rPr sz="2400" b="0" i="0">
                 <a:solidFill>
                   <a:srgbClr val="2A2929"/>
                 </a:solidFill>
@@ -8537,7 +8537,7 @@
               </a:spcAft>
             </a:pPr>
             <a:r>
-              <a:rPr sz="1800" b="1" i="0">
+              <a:rPr sz="2400" b="1" i="0">
                 <a:solidFill>
                   <a:srgbClr val="EDAB0C"/>
                 </a:solidFill>
@@ -8546,7 +8546,7 @@
               <a:t>■  </a:t>
             </a:r>
             <a:r>
-              <a:rPr sz="1800" b="0" i="0">
+              <a:rPr sz="2400" b="0" i="0">
                 <a:solidFill>
                   <a:srgbClr val="2A2929"/>
                 </a:solidFill>

--- a/S1-CL2-Cloud-Disaster-Recovery/delivery/topic_10/Topic_10_Slides.pptx
+++ b/S1-CL2-Cloud-Disaster-Recovery/delivery/topic_10/Topic_10_Slides.pptx
@@ -7,21 +7,21 @@
   <p:sldIdLst>
     <p:sldId id="256" r:id="rId7"/>
     <p:sldId id="257" r:id="rId8"/>
-    <p:sldId id="258" r:id="rId9"/>
-    <p:sldId id="259" r:id="rId10"/>
-    <p:sldId id="260" r:id="rId11"/>
-    <p:sldId id="261" r:id="rId12"/>
-    <p:sldId id="262" r:id="rId13"/>
-    <p:sldId id="263" r:id="rId14"/>
-    <p:sldId id="264" r:id="rId15"/>
-    <p:sldId id="265" r:id="rId16"/>
-    <p:sldId id="266" r:id="rId17"/>
-    <p:sldId id="267" r:id="rId18"/>
-    <p:sldId id="268" r:id="rId19"/>
-    <p:sldId id="269" r:id="rId20"/>
-    <p:sldId id="270" r:id="rId21"/>
-    <p:sldId id="271" r:id="rId22"/>
-    <p:sldId id="272" r:id="rId23"/>
+    <p:sldId id="258" r:id="rId10"/>
+    <p:sldId id="259" r:id="rId11"/>
+    <p:sldId id="260" r:id="rId12"/>
+    <p:sldId id="261" r:id="rId13"/>
+    <p:sldId id="262" r:id="rId14"/>
+    <p:sldId id="263" r:id="rId15"/>
+    <p:sldId id="264" r:id="rId16"/>
+    <p:sldId id="265" r:id="rId17"/>
+    <p:sldId id="266" r:id="rId18"/>
+    <p:sldId id="267" r:id="rId19"/>
+    <p:sldId id="268" r:id="rId20"/>
+    <p:sldId id="269" r:id="rId21"/>
+    <p:sldId id="270" r:id="rId22"/>
+    <p:sldId id="271" r:id="rId23"/>
+    <p:sldId id="272" r:id="rId24"/>
   </p:sldIdLst>
   <p:sldSz cx="12191695" cy="6858000" type="screen4x3"/>
   <p:notesSz cx="6858000" cy="9144000"/>
@@ -121,6 +121,1776 @@
     </a:lvl9pPr>
   </p:defaultTextStyle>
 </p:presentation>
+</file>
+
+<file path=ppt/notesMasters/notesMaster1.xml><?xml version="1.0" encoding="utf-8"?>
+<p:notesMaster xmlns:a="http://schemas.openxmlformats.org/drawingml/2006/main" xmlns:p="http://schemas.openxmlformats.org/presentationml/2006/main" xmlns:r="http://schemas.openxmlformats.org/officeDocument/2006/relationships">
+  <p:cSld>
+    <p:bg>
+      <p:bgRef idx="1001">
+        <a:schemeClr val="bg1"/>
+      </p:bgRef>
+    </p:bg>
+    <p:spTree>
+      <p:nvGrpSpPr>
+        <p:cNvPr id="1" name=""/>
+        <p:cNvGrpSpPr/>
+        <p:nvPr/>
+      </p:nvGrpSpPr>
+      <p:grpSpPr>
+        <a:xfrm>
+          <a:off x="0" y="0"/>
+          <a:ext cx="0" cy="0"/>
+          <a:chOff x="0" y="0"/>
+          <a:chExt cx="0" cy="0"/>
+        </a:xfrm>
+      </p:grpSpPr>
+      <p:sp>
+        <p:nvSpPr>
+          <p:cNvPr id="2" name="Header Placeholder 1"/>
+          <p:cNvSpPr>
+            <a:spLocks noGrp="1"/>
+          </p:cNvSpPr>
+          <p:nvPr>
+            <p:ph type="hdr" sz="quarter"/>
+          </p:nvPr>
+        </p:nvSpPr>
+        <p:spPr>
+          <a:xfrm>
+            <a:off x="0" y="0"/>
+            <a:ext cx="2971800" cy="457200"/>
+          </a:xfrm>
+          <a:prstGeom prst="rect">
+            <a:avLst/>
+          </a:prstGeom>
+        </p:spPr>
+        <p:txBody>
+          <a:bodyPr vert="horz" lIns="91440" tIns="45720" rIns="91440" bIns="45720" rtlCol="0"/>
+          <a:lstStyle>
+            <a:lvl1pPr algn="l">
+              <a:defRPr sz="1200"/>
+            </a:lvl1pPr>
+          </a:lstStyle>
+          <a:p>
+            <a:endParaRPr lang="en-US"/>
+          </a:p>
+        </p:txBody>
+      </p:sp>
+      <p:sp>
+        <p:nvSpPr>
+          <p:cNvPr id="3" name="Date Placeholder 2"/>
+          <p:cNvSpPr>
+            <a:spLocks noGrp="1"/>
+          </p:cNvSpPr>
+          <p:nvPr>
+            <p:ph type="dt" idx="1"/>
+          </p:nvPr>
+        </p:nvSpPr>
+        <p:spPr>
+          <a:xfrm>
+            <a:off x="3884613" y="0"/>
+            <a:ext cx="2971800" cy="457200"/>
+          </a:xfrm>
+          <a:prstGeom prst="rect">
+            <a:avLst/>
+          </a:prstGeom>
+        </p:spPr>
+        <p:txBody>
+          <a:bodyPr vert="horz" lIns="91440" tIns="45720" rIns="91440" bIns="45720" rtlCol="0"/>
+          <a:lstStyle>
+            <a:lvl1pPr algn="r">
+              <a:defRPr sz="1200"/>
+            </a:lvl1pPr>
+          </a:lstStyle>
+          <a:p>
+            <a:fld id="{0F89C1C7-3DCD-1040-A9CF-14679D8B5DDD}" type="datetimeFigureOut">
+              <a:rPr lang="en-US" smtClean="0"/>
+              <a:t>10/17/16</a:t>
+            </a:fld>
+            <a:endParaRPr lang="en-US"/>
+          </a:p>
+        </p:txBody>
+      </p:sp>
+      <p:sp>
+        <p:nvSpPr>
+          <p:cNvPr id="4" name="Slide Image Placeholder 3"/>
+          <p:cNvSpPr>
+            <a:spLocks noGrp="1" noRot="1" noChangeAspect="1"/>
+          </p:cNvSpPr>
+          <p:nvPr>
+            <p:ph type="sldImg" idx="2"/>
+          </p:nvPr>
+        </p:nvSpPr>
+        <p:spPr>
+          <a:xfrm>
+            <a:off x="1143000" y="685800"/>
+            <a:ext cx="4572000" cy="3429000"/>
+          </a:xfrm>
+          <a:prstGeom prst="rect">
+            <a:avLst/>
+          </a:prstGeom>
+          <a:noFill/>
+          <a:ln w="12700">
+            <a:solidFill>
+              <a:prstClr val="black"/>
+            </a:solidFill>
+          </a:ln>
+        </p:spPr>
+        <p:txBody>
+          <a:bodyPr vert="horz" lIns="91440" tIns="45720" rIns="91440" bIns="45720" rtlCol="0" anchor="ctr"/>
+          <a:lstStyle/>
+          <a:p>
+            <a:endParaRPr lang="en-US"/>
+          </a:p>
+        </p:txBody>
+      </p:sp>
+      <p:sp>
+        <p:nvSpPr>
+          <p:cNvPr id="5" name="Notes Placeholder 4"/>
+          <p:cNvSpPr>
+            <a:spLocks noGrp="1"/>
+          </p:cNvSpPr>
+          <p:nvPr>
+            <p:ph type="body" sz="quarter" idx="3"/>
+          </p:nvPr>
+        </p:nvSpPr>
+        <p:spPr>
+          <a:xfrm>
+            <a:off x="685800" y="4343400"/>
+            <a:ext cx="5486400" cy="4114800"/>
+          </a:xfrm>
+          <a:prstGeom prst="rect">
+            <a:avLst/>
+          </a:prstGeom>
+        </p:spPr>
+        <p:txBody>
+          <a:bodyPr vert="horz" lIns="91440" tIns="45720" rIns="91440" bIns="45720" rtlCol="0"/>
+          <a:lstStyle/>
+          <a:p>
+            <a:pPr lvl="0"/>
+            <a:r>
+              <a:rPr lang="en-US" smtClean="0"/>
+              <a:t>Click to edit Master text styles</a:t>
+            </a:r>
+          </a:p>
+          <a:p>
+            <a:pPr lvl="1"/>
+            <a:r>
+              <a:rPr lang="en-US" smtClean="0"/>
+              <a:t>Second level</a:t>
+            </a:r>
+          </a:p>
+          <a:p>
+            <a:pPr lvl="2"/>
+            <a:r>
+              <a:rPr lang="en-US" smtClean="0"/>
+              <a:t>Third level</a:t>
+            </a:r>
+          </a:p>
+          <a:p>
+            <a:pPr lvl="3"/>
+            <a:r>
+              <a:rPr lang="en-US" smtClean="0"/>
+              <a:t>Fourth level</a:t>
+            </a:r>
+          </a:p>
+          <a:p>
+            <a:pPr lvl="4"/>
+            <a:r>
+              <a:rPr lang="en-US" smtClean="0"/>
+              <a:t>Fifth level</a:t>
+            </a:r>
+            <a:endParaRPr lang="en-US"/>
+          </a:p>
+        </p:txBody>
+      </p:sp>
+      <p:sp>
+        <p:nvSpPr>
+          <p:cNvPr id="6" name="Footer Placeholder 5"/>
+          <p:cNvSpPr>
+            <a:spLocks noGrp="1"/>
+          </p:cNvSpPr>
+          <p:nvPr>
+            <p:ph type="ftr" sz="quarter" idx="4"/>
+          </p:nvPr>
+        </p:nvSpPr>
+        <p:spPr>
+          <a:xfrm>
+            <a:off x="0" y="8685213"/>
+            <a:ext cx="2971800" cy="457200"/>
+          </a:xfrm>
+          <a:prstGeom prst="rect">
+            <a:avLst/>
+          </a:prstGeom>
+        </p:spPr>
+        <p:txBody>
+          <a:bodyPr vert="horz" lIns="91440" tIns="45720" rIns="91440" bIns="45720" rtlCol="0" anchor="b"/>
+          <a:lstStyle>
+            <a:lvl1pPr algn="l">
+              <a:defRPr sz="1200"/>
+            </a:lvl1pPr>
+          </a:lstStyle>
+          <a:p>
+            <a:endParaRPr lang="en-US"/>
+          </a:p>
+        </p:txBody>
+      </p:sp>
+      <p:sp>
+        <p:nvSpPr>
+          <p:cNvPr id="7" name="Slide Number Placeholder 6"/>
+          <p:cNvSpPr>
+            <a:spLocks noGrp="1"/>
+          </p:cNvSpPr>
+          <p:nvPr>
+            <p:ph type="sldNum" sz="quarter" idx="5"/>
+          </p:nvPr>
+        </p:nvSpPr>
+        <p:spPr>
+          <a:xfrm>
+            <a:off x="3884613" y="8685213"/>
+            <a:ext cx="2971800" cy="457200"/>
+          </a:xfrm>
+          <a:prstGeom prst="rect">
+            <a:avLst/>
+          </a:prstGeom>
+        </p:spPr>
+        <p:txBody>
+          <a:bodyPr vert="horz" lIns="91440" tIns="45720" rIns="91440" bIns="45720" rtlCol="0" anchor="b"/>
+          <a:lstStyle>
+            <a:lvl1pPr algn="r">
+              <a:defRPr sz="1200"/>
+            </a:lvl1pPr>
+          </a:lstStyle>
+          <a:p>
+            <a:fld id="{BB5E49A5-4136-284D-997B-48E1D791AD67}" type="slidenum">
+              <a:rPr lang="en-US" smtClean="0"/>
+              <a:t>‹#›</a:t>
+            </a:fld>
+            <a:endParaRPr lang="en-US"/>
+          </a:p>
+        </p:txBody>
+      </p:sp>
+    </p:spTree>
+    <p:extLst>
+      <p:ext uri="{BB962C8B-B14F-4D97-AF65-F5344CB8AC3E}">
+        <p14:creationId xmlns:p14="http://schemas.microsoft.com/office/powerpoint/2010/main" val="2623252185"/>
+      </p:ext>
+    </p:extLst>
+  </p:cSld>
+  <p:clrMap bg1="lt1" tx1="dk1" bg2="lt2" tx2="dk2" accent1="accent1" accent2="accent2" accent3="accent3" accent4="accent4" accent5="accent5" accent6="accent6" hlink="hlink" folHlink="folHlink"/>
+  <p:notesStyle>
+    <a:lvl1pPr marL="0" algn="l" defTabSz="457200" rtl="0" eaLnBrk="1" latinLnBrk="0" hangingPunct="1">
+      <a:defRPr sz="1200" kern="1200">
+        <a:solidFill>
+          <a:schemeClr val="tx1"/>
+        </a:solidFill>
+        <a:latin typeface="+mn-lt"/>
+        <a:ea typeface="+mn-ea"/>
+        <a:cs typeface="+mn-cs"/>
+      </a:defRPr>
+    </a:lvl1pPr>
+    <a:lvl2pPr marL="457200" algn="l" defTabSz="457200" rtl="0" eaLnBrk="1" latinLnBrk="0" hangingPunct="1">
+      <a:defRPr sz="1200" kern="1200">
+        <a:solidFill>
+          <a:schemeClr val="tx1"/>
+        </a:solidFill>
+        <a:latin typeface="+mn-lt"/>
+        <a:ea typeface="+mn-ea"/>
+        <a:cs typeface="+mn-cs"/>
+      </a:defRPr>
+    </a:lvl2pPr>
+    <a:lvl3pPr marL="914400" algn="l" defTabSz="457200" rtl="0" eaLnBrk="1" latinLnBrk="0" hangingPunct="1">
+      <a:defRPr sz="1200" kern="1200">
+        <a:solidFill>
+          <a:schemeClr val="tx1"/>
+        </a:solidFill>
+        <a:latin typeface="+mn-lt"/>
+        <a:ea typeface="+mn-ea"/>
+        <a:cs typeface="+mn-cs"/>
+      </a:defRPr>
+    </a:lvl3pPr>
+    <a:lvl4pPr marL="1371600" algn="l" defTabSz="457200" rtl="0" eaLnBrk="1" latinLnBrk="0" hangingPunct="1">
+      <a:defRPr sz="1200" kern="1200">
+        <a:solidFill>
+          <a:schemeClr val="tx1"/>
+        </a:solidFill>
+        <a:latin typeface="+mn-lt"/>
+        <a:ea typeface="+mn-ea"/>
+        <a:cs typeface="+mn-cs"/>
+      </a:defRPr>
+    </a:lvl4pPr>
+    <a:lvl5pPr marL="1828800" algn="l" defTabSz="457200" rtl="0" eaLnBrk="1" latinLnBrk="0" hangingPunct="1">
+      <a:defRPr sz="1200" kern="1200">
+        <a:solidFill>
+          <a:schemeClr val="tx1"/>
+        </a:solidFill>
+        <a:latin typeface="+mn-lt"/>
+        <a:ea typeface="+mn-ea"/>
+        <a:cs typeface="+mn-cs"/>
+      </a:defRPr>
+    </a:lvl5pPr>
+    <a:lvl6pPr marL="2286000" algn="l" defTabSz="457200" rtl="0" eaLnBrk="1" latinLnBrk="0" hangingPunct="1">
+      <a:defRPr sz="1200" kern="1200">
+        <a:solidFill>
+          <a:schemeClr val="tx1"/>
+        </a:solidFill>
+        <a:latin typeface="+mn-lt"/>
+        <a:ea typeface="+mn-ea"/>
+        <a:cs typeface="+mn-cs"/>
+      </a:defRPr>
+    </a:lvl6pPr>
+    <a:lvl7pPr marL="2743200" algn="l" defTabSz="457200" rtl="0" eaLnBrk="1" latinLnBrk="0" hangingPunct="1">
+      <a:defRPr sz="1200" kern="1200">
+        <a:solidFill>
+          <a:schemeClr val="tx1"/>
+        </a:solidFill>
+        <a:latin typeface="+mn-lt"/>
+        <a:ea typeface="+mn-ea"/>
+        <a:cs typeface="+mn-cs"/>
+      </a:defRPr>
+    </a:lvl7pPr>
+    <a:lvl8pPr marL="3200400" algn="l" defTabSz="457200" rtl="0" eaLnBrk="1" latinLnBrk="0" hangingPunct="1">
+      <a:defRPr sz="1200" kern="1200">
+        <a:solidFill>
+          <a:schemeClr val="tx1"/>
+        </a:solidFill>
+        <a:latin typeface="+mn-lt"/>
+        <a:ea typeface="+mn-ea"/>
+        <a:cs typeface="+mn-cs"/>
+      </a:defRPr>
+    </a:lvl8pPr>
+    <a:lvl9pPr marL="3657600" algn="l" defTabSz="457200" rtl="0" eaLnBrk="1" latinLnBrk="0" hangingPunct="1">
+      <a:defRPr sz="1200" kern="1200">
+        <a:solidFill>
+          <a:schemeClr val="tx1"/>
+        </a:solidFill>
+        <a:latin typeface="+mn-lt"/>
+        <a:ea typeface="+mn-ea"/>
+        <a:cs typeface="+mn-cs"/>
+      </a:defRPr>
+    </a:lvl9pPr>
+  </p:notesStyle>
+</p:notesMaster>
+</file>
+
+<file path=ppt/notesSlides/notesSlide1.xml><?xml version="1.0" encoding="utf-8"?>
+<p:notes xmlns:a="http://schemas.openxmlformats.org/drawingml/2006/main" xmlns:p="http://schemas.openxmlformats.org/presentationml/2006/main" xmlns:r="http://schemas.openxmlformats.org/officeDocument/2006/relationships">
+  <p:cSld>
+    <p:spTree>
+      <p:nvGrpSpPr>
+        <p:cNvPr id="1" name=""/>
+        <p:cNvGrpSpPr/>
+        <p:nvPr/>
+      </p:nvGrpSpPr>
+      <p:grpSpPr>
+        <a:xfrm>
+          <a:off x="0" y="0"/>
+          <a:ext cx="0" cy="0"/>
+          <a:chOff x="0" y="0"/>
+          <a:chExt cx="0" cy="0"/>
+        </a:xfrm>
+      </p:grpSpPr>
+      <p:sp>
+        <p:nvSpPr>
+          <p:cNvPr id="2" name="Slide Image Placeholder 1"/>
+          <p:cNvSpPr>
+            <a:spLocks noGrp="1"/>
+          </p:cNvSpPr>
+          <p:nvPr>
+            <p:ph type="sldImg" idx="2"/>
+          </p:nvPr>
+        </p:nvSpPr>
+        <p:spPr/>
+      </p:sp>
+      <p:sp>
+        <p:nvSpPr>
+          <p:cNvPr id="3" name="Notes Placeholder 2"/>
+          <p:cNvSpPr>
+            <a:spLocks noGrp="1"/>
+          </p:cNvSpPr>
+          <p:nvPr>
+            <p:ph type="body" idx="3" sz="quarter"/>
+          </p:nvPr>
+        </p:nvSpPr>
+        <p:spPr/>
+        <p:txBody>
+          <a:bodyPr/>
+          <a:lstStyle/>
+          <a:p>
+            <a:r>
+              <a:t>Frame Topic 10 as the closeout — the technical work is done (Topics 6–9); today packages, hands over</a:t>
+            </a:r>
+          </a:p>
+          <a:p>
+            <a:r>
+              <a:t>and signs off. Set the four deliverables; no new build.</a:t>
+            </a:r>
+          </a:p>
+          <a:p>
+            <a:r>
+              <a:t>• First bullet: Topics 6–9 built and monitored the system; Topic 10 PACKAGES and closes it out. The</a:t>
+            </a:r>
+          </a:p>
+          <a:p>
+            <a:r>
+              <a:t>engineering is behind them; this is the professional wrap.</a:t>
+            </a:r>
+          </a:p>
+          <a:p>
+            <a:r>
+              <a:t>• Second bullet: four things — user documentation, the Deployment Report, sign-off, and the written</a:t>
+            </a:r>
+          </a:p>
+          <a:p>
+            <a:r>
+              <a:t>knowledge evidence. Preview them as today's map.</a:t>
+            </a:r>
+          </a:p>
+          <a:p>
+            <a:r>
+              <a:t>• Third bullet (the recurring truth): the report is assembled from what they captured LIVE during the</a:t>
+            </a:r>
+          </a:p>
+          <a:p>
+            <a:r>
+              <a:t>build — you can't reconstruct it later. If evidence is thin, that's a Topics 6–9 habit gap surfacing now.</a:t>
+            </a:r>
+          </a:p>
+          <a:p>
+            <a:r>
+              <a:t>• Fourth bullet: no new build here — document, hand over, sign off. Reset expectations from console</a:t>
+            </a:r>
+          </a:p>
+          <a:p>
+            <a:r>
+              <a:t>work to writing + communication.</a:t>
+            </a:r>
+          </a:p>
+          <a:p>
+            <a:r>
+              <a:t>Misconception to pre-empt: "documentation is the easy bit." No — the report and user docs are assessed</a:t>
+            </a:r>
+          </a:p>
+          <a:p>
+            <a:r>
+              <a:t>on quality (D13) and are what a client actually receives; a great build with a poor handover fails the</a:t>
+            </a:r>
+          </a:p>
+          <a:p>
+            <a:r>
+              <a:t>professional test.</a:t>
+            </a:r>
+          </a:p>
+          <a:p>
+            <a:r>
+              <a:t>Question to pose: "Your build works perfectly but you kept no screenshots — can you write the</a:t>
+            </a:r>
+          </a:p>
+          <a:p>
+            <a:r>
+              <a:t>Deployment Report?" (no — it's assembled from live-captured evidence; drives home the Topics 6–9 discipline).</a:t>
+            </a:r>
+          </a:p>
+          <a:p>
+            <a:r>
+              <a:t>UoC/AT2 tie: opens the closeout — ICTCLD505 documentation + ICTCLD503 feedback/sign-off — evidenced in</a:t>
+            </a:r>
+          </a:p>
+          <a:p>
+            <a:r>
+              <a:t>AT2 §7–8 (D10–D13).</a:t>
+            </a:r>
+          </a:p>
+        </p:txBody>
+      </p:sp>
+      <p:sp>
+        <p:nvSpPr>
+          <p:cNvPr id="4" name="Slide Number Placeholder 3"/>
+          <p:cNvSpPr>
+            <a:spLocks noGrp="1"/>
+          </p:cNvSpPr>
+          <p:nvPr>
+            <p:ph type="sldNum" idx="5" sz="quarter"/>
+          </p:nvPr>
+        </p:nvSpPr>
+        <p:spPr/>
+      </p:sp>
+    </p:spTree>
+  </p:cSld>
+  <p:clrMapOvr>
+    <a:masterClrMapping/>
+  </p:clrMapOvr>
+</p:notes>
+</file>
+
+<file path=ppt/notesSlides/notesSlide10.xml><?xml version="1.0" encoding="utf-8"?>
+<p:notes xmlns:a="http://schemas.openxmlformats.org/drawingml/2006/main" xmlns:p="http://schemas.openxmlformats.org/presentationml/2006/main" xmlns:r="http://schemas.openxmlformats.org/officeDocument/2006/relationships">
+  <p:cSld>
+    <p:spTree>
+      <p:nvGrpSpPr>
+        <p:cNvPr id="1" name=""/>
+        <p:cNvGrpSpPr/>
+        <p:nvPr/>
+      </p:nvGrpSpPr>
+      <p:grpSpPr>
+        <a:xfrm>
+          <a:off x="0" y="0"/>
+          <a:ext cx="0" cy="0"/>
+          <a:chOff x="0" y="0"/>
+          <a:chExt cx="0" cy="0"/>
+        </a:xfrm>
+      </p:grpSpPr>
+      <p:sp>
+        <p:nvSpPr>
+          <p:cNvPr id="2" name="Slide Image Placeholder 1"/>
+          <p:cNvSpPr>
+            <a:spLocks noGrp="1"/>
+          </p:cNvSpPr>
+          <p:nvPr>
+            <p:ph type="sldImg" idx="2"/>
+          </p:nvPr>
+        </p:nvSpPr>
+        <p:spPr/>
+      </p:sp>
+      <p:sp>
+        <p:nvSpPr>
+          <p:cNvPr id="3" name="Notes Placeholder 2"/>
+          <p:cNvSpPr>
+            <a:spLocks noGrp="1"/>
+          </p:cNvSpPr>
+          <p:nvPr>
+            <p:ph type="body" idx="3" sz="quarter"/>
+          </p:nvPr>
+        </p:nvSpPr>
+        <p:spPr/>
+        <p:txBody>
+          <a:bodyPr/>
+          <a:lstStyle/>
+          <a:p>
+            <a:r>
+              <a:t>Facilitation — the C4 practice; students write contextual KE responses on their practice IaC +</a:t>
+            </a:r>
+          </a:p>
+          <a:p>
+            <a:r>
+              <a:t>microservice work.</a:t>
+            </a:r>
+          </a:p>
+          <a:p>
+            <a:r>
+              <a:t>Tell students, in these words: "For your practice build, write the contextual knowledge-evidence</a:t>
+            </a:r>
+          </a:p>
+          <a:p>
+            <a:r>
+              <a:t>responses on your IaC and microservice work — answer each against what YOU built, not a textbook</a:t>
+            </a:r>
+          </a:p>
+          <a:p>
+            <a:r>
+              <a:t>definition."</a:t>
+            </a:r>
+          </a:p>
+          <a:p>
+            <a:r>
+              <a:t>Steps (put on the board):</a:t>
+            </a:r>
+          </a:p>
+          <a:p>
+            <a:r>
+              <a:t>1. Take each KE prompt (IaC concepts/benefits, testing/debugging, the shared foundations).</a:t>
+            </a:r>
+          </a:p>
+          <a:p>
+            <a:r>
+              <a:t>2. Answer it CONTEXTUALLY — cite your own template, your own tests, your own fixes from Topics 6–9.</a:t>
+            </a:r>
+          </a:p>
+          <a:p>
+            <a:r>
+              <a:t>3. Assemble the responses into the KE appendix of the report.</a:t>
+            </a:r>
+          </a:p>
+          <a:p>
+            <a:r>
+              <a:t>Must produce: a set of contextual KE responses grounded in the practice build — the §8 appendix.</a:t>
+            </a:r>
+          </a:p>
+          <a:p>
+            <a:r>
+              <a:t>Timing: ~20 min. Where they get stuck: writing generic definitions — push them to name a concrete</a:t>
+            </a:r>
+          </a:p>
+          <a:p>
+            <a:r>
+              <a:t>thing from their build in every answer; and thin answers where their build evidence was thin (a Topics</a:t>
+            </a:r>
+          </a:p>
+          <a:p>
+            <a:r>
+              <a:t>6–9 gap surfacing).</a:t>
+            </a:r>
+          </a:p>
+          <a:p>
+            <a:r>
+              <a:t>Share-back prompt: take one KE and compare a generic answer with a build-grounded one — the room sees</a:t>
+            </a:r>
+          </a:p>
+          <a:p>
+            <a:r>
+              <a:t>the difference contextual makes.</a:t>
+            </a:r>
+          </a:p>
+          <a:p>
+            <a:r>
+              <a:t>No-leakage note: the practice build is comparable-not-identical to the AT2 build; keep the KE responses</a:t>
+            </a:r>
+          </a:p>
+          <a:p>
+            <a:r>
+              <a:t>on the practice build here.</a:t>
+            </a:r>
+          </a:p>
+        </p:txBody>
+      </p:sp>
+      <p:sp>
+        <p:nvSpPr>
+          <p:cNvPr id="4" name="Slide Number Placeholder 3"/>
+          <p:cNvSpPr>
+            <a:spLocks noGrp="1"/>
+          </p:cNvSpPr>
+          <p:nvPr>
+            <p:ph type="sldNum" idx="5" sz="quarter"/>
+          </p:nvPr>
+        </p:nvSpPr>
+        <p:spPr/>
+      </p:sp>
+    </p:spTree>
+  </p:cSld>
+  <p:clrMapOvr>
+    <a:masterClrMapping/>
+  </p:clrMapOvr>
+</p:notes>
+</file>
+
+<file path=ppt/notesSlides/notesSlide2.xml><?xml version="1.0" encoding="utf-8"?>
+<p:notes xmlns:a="http://schemas.openxmlformats.org/drawingml/2006/main" xmlns:p="http://schemas.openxmlformats.org/presentationml/2006/main" xmlns:r="http://schemas.openxmlformats.org/officeDocument/2006/relationships">
+  <p:cSld>
+    <p:spTree>
+      <p:nvGrpSpPr>
+        <p:cNvPr id="1" name=""/>
+        <p:cNvGrpSpPr/>
+        <p:nvPr/>
+      </p:nvGrpSpPr>
+      <p:grpSpPr>
+        <a:xfrm>
+          <a:off x="0" y="0"/>
+          <a:ext cx="0" cy="0"/>
+          <a:chOff x="0" y="0"/>
+          <a:chExt cx="0" cy="0"/>
+        </a:xfrm>
+      </p:grpSpPr>
+      <p:sp>
+        <p:nvSpPr>
+          <p:cNvPr id="2" name="Slide Image Placeholder 1"/>
+          <p:cNvSpPr>
+            <a:spLocks noGrp="1"/>
+          </p:cNvSpPr>
+          <p:nvPr>
+            <p:ph type="sldImg" idx="2"/>
+          </p:nvPr>
+        </p:nvSpPr>
+        <p:spPr/>
+      </p:sp>
+      <p:sp>
+        <p:nvSpPr>
+          <p:cNvPr id="3" name="Notes Placeholder 2"/>
+          <p:cNvSpPr>
+            <a:spLocks noGrp="1"/>
+          </p:cNvSpPr>
+          <p:nvPr>
+            <p:ph type="body" idx="3" sz="quarter"/>
+          </p:nvPr>
+        </p:nvSpPr>
+        <p:spPr/>
+        <p:txBody>
+          <a:bodyPr/>
+          <a:lstStyle/>
+          <a:p>
+            <a:r>
+              <a:t>A primer on what USER documentation for IaC is for — someone who didn't write the template must be</a:t>
+            </a:r>
+          </a:p>
+          <a:p>
+            <a:r>
+              <a:t>able to run it. Frame the reader, then the content.</a:t>
+            </a:r>
+          </a:p>
+          <a:p>
+            <a:r>
+              <a:t>• First bullet: user docs let someone who did NOT write the template deploy, update and delete it</a:t>
+            </a:r>
+          </a:p>
+          <a:p>
+            <a:r>
+              <a:t>safely. The audience is a future operator, not the author.</a:t>
+            </a:r>
+          </a:p>
+          <a:p>
+            <a:r>
+              <a:t>• Second bullet: include the templates AND the parameters — what each parameter does and its allowed</a:t>
+            </a:r>
+          </a:p>
+          <a:p>
+            <a:r>
+              <a:t>values. Parameters are the knobs; undocumented knobs are traps.</a:t>
+            </a:r>
+          </a:p>
+          <a:p>
+            <a:r>
+              <a:t>• Third bullet (FS Writing): clear, logical structure and the required syntax — a reader follows it</a:t>
+            </a:r>
+          </a:p>
+          <a:p>
+            <a:r>
+              <a:t>without you in the room. Structure is assessed, not just content.</a:t>
+            </a:r>
+          </a:p>
+          <a:p>
+            <a:r>
+              <a:t>Misconception to pre-empt: "the template is self-documenting." No — a stranger under time pressure needs</a:t>
+            </a:r>
+          </a:p>
+          <a:p>
+            <a:r>
+              <a:t>the deploy/update/delete steps and the parameter meanings spelled out; readable code isn't a runbook.</a:t>
+            </a:r>
+          </a:p>
+          <a:p>
+            <a:r>
+              <a:t>Question to pose: "You hand your stack to YAT's ICT team and leave — what must the doc let them do</a:t>
+            </a:r>
+          </a:p>
+          <a:p>
+            <a:r>
+              <a:t>without ringing you?" (deploy, update via change set, delete — safely, with the right parameters).</a:t>
+            </a:r>
+          </a:p>
+          <a:p>
+            <a:r>
+              <a:t>UoC/AT2 tie: ICTCLD505 PC 4.1 + PE 4 (create user documentation incl. templates) + FS Writing → AT2</a:t>
+            </a:r>
+          </a:p>
+          <a:p>
+            <a:r>
+              <a:t>§7.1 (D10).</a:t>
+            </a:r>
+          </a:p>
+        </p:txBody>
+      </p:sp>
+      <p:sp>
+        <p:nvSpPr>
+          <p:cNvPr id="4" name="Slide Number Placeholder 3"/>
+          <p:cNvSpPr>
+            <a:spLocks noGrp="1"/>
+          </p:cNvSpPr>
+          <p:nvPr>
+            <p:ph type="sldNum" idx="5" sz="quarter"/>
+          </p:nvPr>
+        </p:nvSpPr>
+        <p:spPr/>
+      </p:sp>
+    </p:spTree>
+  </p:cSld>
+  <p:clrMapOvr>
+    <a:masterClrMapping/>
+  </p:clrMapOvr>
+</p:notes>
+</file>
+
+<file path=ppt/notesSlides/notesSlide3.xml><?xml version="1.0" encoding="utf-8"?>
+<p:notes xmlns:a="http://schemas.openxmlformats.org/drawingml/2006/main" xmlns:p="http://schemas.openxmlformats.org/presentationml/2006/main" xmlns:r="http://schemas.openxmlformats.org/officeDocument/2006/relationships">
+  <p:cSld>
+    <p:spTree>
+      <p:nvGrpSpPr>
+        <p:cNvPr id="1" name=""/>
+        <p:cNvGrpSpPr/>
+        <p:nvPr/>
+      </p:nvGrpSpPr>
+      <p:grpSpPr>
+        <a:xfrm>
+          <a:off x="0" y="0"/>
+          <a:ext cx="0" cy="0"/>
+          <a:chOff x="0" y="0"/>
+          <a:chExt cx="0" cy="0"/>
+        </a:xfrm>
+      </p:grpSpPr>
+      <p:sp>
+        <p:nvSpPr>
+          <p:cNvPr id="2" name="Slide Image Placeholder 1"/>
+          <p:cNvSpPr>
+            <a:spLocks noGrp="1"/>
+          </p:cNvSpPr>
+          <p:nvPr>
+            <p:ph type="sldImg" idx="2"/>
+          </p:nvPr>
+        </p:nvSpPr>
+        <p:spPr/>
+      </p:sp>
+      <p:sp>
+        <p:nvSpPr>
+          <p:cNvPr id="3" name="Notes Placeholder 2"/>
+          <p:cNvSpPr>
+            <a:spLocks noGrp="1"/>
+          </p:cNvSpPr>
+          <p:nvPr>
+            <p:ph type="body" idx="3" sz="quarter"/>
+          </p:nvPr>
+        </p:nvSpPr>
+        <p:spPr/>
+        <p:txBody>
+          <a:bodyPr/>
+          <a:lstStyle/>
+          <a:p>
+            <a:r>
+              <a:t>Make the primer concrete for THEIR stacks — the operating procedures a handover doc must carry.</a:t>
+            </a:r>
+          </a:p>
+          <a:p>
+            <a:r>
+              <a:t>• First bullet: document how to DEPLOY, UPDATE (via change set) and DELETE each stack, with its</a:t>
+            </a:r>
+          </a:p>
+          <a:p>
+            <a:r>
+              <a:t>parameters. Three operations, each with steps — the change-set path for updates especially.</a:t>
+            </a:r>
+          </a:p>
+          <a:p>
+            <a:r>
+              <a:t>• Second bullet: note the Region substitution — the stacks deploy to us-east-1 in the lab, and Region</a:t>
+            </a:r>
+          </a:p>
+          <a:p>
+            <a:r>
+              <a:t>is a PARAMETER, so the doc says how to point it elsewhere. Don't bury the substitution.</a:t>
+            </a:r>
+          </a:p>
+          <a:p>
+            <a:r>
+              <a:t>• Third bullet: write to the YAT template — logical order, plain professional English. The house style</a:t>
+            </a:r>
+          </a:p>
+          <a:p>
+            <a:r>
+              <a:t>is part of the mark (D13).</a:t>
+            </a:r>
+          </a:p>
+          <a:p>
+            <a:r>
+              <a:t>Misconception to pre-empt: "update means delete and redeploy." No — teach the CHANGE SET path for</a:t>
+            </a:r>
+          </a:p>
+          <a:p>
+            <a:r>
+              <a:t>updates (preview then apply); tearing down to change a parameter loses data and isn't the professional move.</a:t>
+            </a:r>
+          </a:p>
+          <a:p>
+            <a:r>
+              <a:t>Question to pose: "What's the safe way to change a running stack's parameter — and how do you know what</a:t>
+            </a:r>
+          </a:p>
+          <a:p>
+            <a:r>
+              <a:t>the change will do before it happens?" (a change set — preview, then execute).</a:t>
+            </a:r>
+          </a:p>
+          <a:p>
+            <a:r>
+              <a:t>UoC/AT2 tie: ICTCLD505 PC 4.1 + PE 4 + FS Writing → AT2 §7.1 (D10); deploy/update/delete with</a:t>
+            </a:r>
+          </a:p>
+          <a:p>
+            <a:r>
+              <a:t>parameters is exactly the user-doc content assessed.</a:t>
+            </a:r>
+          </a:p>
+        </p:txBody>
+      </p:sp>
+      <p:sp>
+        <p:nvSpPr>
+          <p:cNvPr id="4" name="Slide Number Placeholder 3"/>
+          <p:cNvSpPr>
+            <a:spLocks noGrp="1"/>
+          </p:cNvSpPr>
+          <p:nvPr>
+            <p:ph type="sldNum" idx="5" sz="quarter"/>
+          </p:nvPr>
+        </p:nvSpPr>
+        <p:spPr/>
+      </p:sp>
+    </p:spTree>
+  </p:cSld>
+  <p:clrMapOvr>
+    <a:masterClrMapping/>
+  </p:clrMapOvr>
+</p:notes>
+</file>
+
+<file path=ppt/notesSlides/notesSlide4.xml><?xml version="1.0" encoding="utf-8"?>
+<p:notes xmlns:a="http://schemas.openxmlformats.org/drawingml/2006/main" xmlns:p="http://schemas.openxmlformats.org/presentationml/2006/main" xmlns:r="http://schemas.openxmlformats.org/officeDocument/2006/relationships">
+  <p:cSld>
+    <p:spTree>
+      <p:nvGrpSpPr>
+        <p:cNvPr id="1" name=""/>
+        <p:cNvGrpSpPr/>
+        <p:nvPr/>
+      </p:nvGrpSpPr>
+      <p:grpSpPr>
+        <a:xfrm>
+          <a:off x="0" y="0"/>
+          <a:ext cx="0" cy="0"/>
+          <a:chOff x="0" y="0"/>
+          <a:chExt cx="0" cy="0"/>
+        </a:xfrm>
+      </p:grpSpPr>
+      <p:sp>
+        <p:nvSpPr>
+          <p:cNvPr id="2" name="Slide Image Placeholder 1"/>
+          <p:cNvSpPr>
+            <a:spLocks noGrp="1"/>
+          </p:cNvSpPr>
+          <p:nvPr>
+            <p:ph type="sldImg" idx="2"/>
+          </p:nvPr>
+        </p:nvSpPr>
+        <p:spPr/>
+      </p:sp>
+      <p:sp>
+        <p:nvSpPr>
+          <p:cNvPr id="3" name="Notes Placeholder 2"/>
+          <p:cNvSpPr>
+            <a:spLocks noGrp="1"/>
+          </p:cNvSpPr>
+          <p:nvPr>
+            <p:ph type="body" idx="3" sz="quarter"/>
+          </p:nvPr>
+        </p:nvSpPr>
+        <p:spPr/>
+        <p:txBody>
+          <a:bodyPr/>
+          <a:lstStyle/>
+          <a:p>
+            <a:r>
+              <a:t>Facilitation — the C1 practice; students write the user documentation for their practice stacks.</a:t>
+            </a:r>
+          </a:p>
+          <a:p>
+            <a:r>
+              <a:t>Tell students, in these words: "For your practice build, write the user documentation for your stacks</a:t>
+            </a:r>
+          </a:p>
+          <a:p>
+            <a:r>
+              <a:t>— how to deploy, update and delete each one, with its parameters, in the YAT template."</a:t>
+            </a:r>
+          </a:p>
+          <a:p>
+            <a:r>
+              <a:t>Steps (put on the board):</a:t>
+            </a:r>
+          </a:p>
+          <a:p>
+            <a:r>
+              <a:t>1. List each stack and its parameters (name, what it does, allowed values).</a:t>
+            </a:r>
+          </a:p>
+          <a:p>
+            <a:r>
+              <a:t>2. Write the deploy, update (change set) and delete procedure for each — steps a stranger can follow.</a:t>
+            </a:r>
+          </a:p>
+          <a:p>
+            <a:r>
+              <a:t>3. Note the Region substitution (Region is a parameter; deploys to us-east-1 in the lab).</a:t>
+            </a:r>
+          </a:p>
+          <a:p>
+            <a:r>
+              <a:t>4. Put it in logical order in the YAT template, plain professional English.</a:t>
+            </a:r>
+          </a:p>
+          <a:p>
+            <a:r>
+              <a:t>Must produce: user documentation covering deploy/update/delete with parameters for their stacks —</a:t>
+            </a:r>
+          </a:p>
+          <a:p>
+            <a:r>
+              <a:t>the §7.1 deliverable.</a:t>
+            </a:r>
+          </a:p>
+          <a:p>
+            <a:r>
+              <a:t>Timing: ~25 min. Where they get stuck: they describe WHAT the template contains instead of HOW to</a:t>
+            </a:r>
+          </a:p>
+          <a:p>
+            <a:r>
+              <a:t>operate it — push them to write procedures (numbered steps), and to cover update-via-change-set, not</a:t>
+            </a:r>
+          </a:p>
+          <a:p>
+            <a:r>
+              <a:t>just deploy.</a:t>
+            </a:r>
+          </a:p>
+          <a:p>
+            <a:r>
+              <a:t>Share-back prompt: swap docs with a neighbour — "could you deploy this stack from their doc alone?"</a:t>
+            </a:r>
+          </a:p>
+          <a:p>
+            <a:r>
+              <a:t>No-leakage note: the practice build is comparable-not-identical to the AT2 build; keep them documenting</a:t>
+            </a:r>
+          </a:p>
+          <a:p>
+            <a:r>
+              <a:t>the practice stacks here.</a:t>
+            </a:r>
+          </a:p>
+        </p:txBody>
+      </p:sp>
+      <p:sp>
+        <p:nvSpPr>
+          <p:cNvPr id="4" name="Slide Number Placeholder 3"/>
+          <p:cNvSpPr>
+            <a:spLocks noGrp="1"/>
+          </p:cNvSpPr>
+          <p:nvPr>
+            <p:ph type="sldNum" idx="5" sz="quarter"/>
+          </p:nvPr>
+        </p:nvSpPr>
+        <p:spPr/>
+      </p:sp>
+    </p:spTree>
+  </p:cSld>
+  <p:clrMapOvr>
+    <a:masterClrMapping/>
+  </p:clrMapOvr>
+</p:notes>
+</file>
+
+<file path=ppt/notesSlides/notesSlide5.xml><?xml version="1.0" encoding="utf-8"?>
+<p:notes xmlns:a="http://schemas.openxmlformats.org/drawingml/2006/main" xmlns:p="http://schemas.openxmlformats.org/presentationml/2006/main" xmlns:r="http://schemas.openxmlformats.org/officeDocument/2006/relationships">
+  <p:cSld>
+    <p:spTree>
+      <p:nvGrpSpPr>
+        <p:cNvPr id="1" name=""/>
+        <p:cNvGrpSpPr/>
+        <p:nvPr/>
+      </p:nvGrpSpPr>
+      <p:grpSpPr>
+        <a:xfrm>
+          <a:off x="0" y="0"/>
+          <a:ext cx="0" cy="0"/>
+          <a:chOff x="0" y="0"/>
+          <a:chExt cx="0" cy="0"/>
+        </a:xfrm>
+      </p:grpSpPr>
+      <p:sp>
+        <p:nvSpPr>
+          <p:cNvPr id="2" name="Slide Image Placeholder 1"/>
+          <p:cNvSpPr>
+            <a:spLocks noGrp="1"/>
+          </p:cNvSpPr>
+          <p:nvPr>
+            <p:ph type="sldImg" idx="2"/>
+          </p:nvPr>
+        </p:nvSpPr>
+        <p:spPr/>
+      </p:sp>
+      <p:sp>
+        <p:nvSpPr>
+          <p:cNvPr id="3" name="Notes Placeholder 2"/>
+          <p:cNvSpPr>
+            <a:spLocks noGrp="1"/>
+          </p:cNvSpPr>
+          <p:nvPr>
+            <p:ph type="body" idx="3" sz="quarter"/>
+          </p:nvPr>
+        </p:nvSpPr>
+        <p:spPr/>
+        <p:txBody>
+          <a:bodyPr/>
+          <a:lstStyle/>
+          <a:p>
+            <a:r>
+              <a:t>Teach the Deployment Report as an ASSEMBLY of evidence they already have, plus the feedback loop.</a:t>
+            </a:r>
+          </a:p>
+          <a:p>
+            <a:r>
+              <a:t>• First bullet: assemble the report — the build narrative, the configuration decisions, and the</a:t>
+            </a:r>
+          </a:p>
+          <a:p>
+            <a:r>
+              <a:t>test/troubleshooting evidence. Three strands they generated across Topics 6–9.</a:t>
+            </a:r>
+          </a:p>
+          <a:p>
+            <a:r>
+              <a:t>• Second bullet (the recurring truth): it is BUILT from the screenshots and exports captured as they</a:t>
+            </a:r>
+          </a:p>
+          <a:p>
+            <a:r>
+              <a:t>went. Assembly is only easy if the capturing was done; surface any gaps now.</a:t>
+            </a:r>
+          </a:p>
+          <a:p>
+            <a:r>
+              <a:t>• Third bullet: confirm, seek and RESPOND to feedback with the required personnel — adjust the report,</a:t>
+            </a:r>
+          </a:p>
+          <a:p>
+            <a:r>
+              <a:t>or defend a choice WITH REASONS. Feedback is a two-way professional exchange, not just corrections.</a:t>
+            </a:r>
+          </a:p>
+          <a:p>
+            <a:r>
+              <a:t>Misconception to pre-empt: "feedback means do whatever I'm told." No — you either incorporate it or</a:t>
+            </a:r>
+          </a:p>
+          <a:p>
+            <a:r>
+              <a:t>justify your decision with reasons; a defensible "no, because…" is a valid professional response (PC 4.2).</a:t>
+            </a:r>
+          </a:p>
+          <a:p>
+            <a:r>
+              <a:t>Question to pose: "A reviewer says your alarm threshold is too high — what are your two legitimate</a:t>
+            </a:r>
+          </a:p>
+          <a:p>
+            <a:r>
+              <a:t>responses?" (adjust it, OR defend it by tracing to the design spec — both are 'responding to feedback').</a:t>
+            </a:r>
+          </a:p>
+          <a:p>
+            <a:r>
+              <a:t>UoC/AT2 tie: ICTCLD503 PC 4.2 (confirm/seek/respond to feedback) → AT2 §7.5–7.6 (D11); the report</a:t>
+            </a:r>
+          </a:p>
+          <a:p>
+            <a:r>
+              <a:t>assembly also feeds document quality (D13).</a:t>
+            </a:r>
+          </a:p>
+        </p:txBody>
+      </p:sp>
+      <p:sp>
+        <p:nvSpPr>
+          <p:cNvPr id="4" name="Slide Number Placeholder 3"/>
+          <p:cNvSpPr>
+            <a:spLocks noGrp="1"/>
+          </p:cNvSpPr>
+          <p:nvPr>
+            <p:ph type="sldNum" idx="5" sz="quarter"/>
+          </p:nvPr>
+        </p:nvSpPr>
+        <p:spPr/>
+      </p:sp>
+    </p:spTree>
+  </p:cSld>
+  <p:clrMapOvr>
+    <a:masterClrMapping/>
+  </p:clrMapOvr>
+</p:notes>
+</file>
+
+<file path=ppt/notesSlides/notesSlide6.xml><?xml version="1.0" encoding="utf-8"?>
+<p:notes xmlns:a="http://schemas.openxmlformats.org/drawingml/2006/main" xmlns:p="http://schemas.openxmlformats.org/presentationml/2006/main" xmlns:r="http://schemas.openxmlformats.org/officeDocument/2006/relationships">
+  <p:cSld>
+    <p:spTree>
+      <p:nvGrpSpPr>
+        <p:cNvPr id="1" name=""/>
+        <p:cNvGrpSpPr/>
+        <p:nvPr/>
+      </p:nvGrpSpPr>
+      <p:grpSpPr>
+        <a:xfrm>
+          <a:off x="0" y="0"/>
+          <a:ext cx="0" cy="0"/>
+          <a:chOff x="0" y="0"/>
+          <a:chExt cx="0" cy="0"/>
+        </a:xfrm>
+      </p:grpSpPr>
+      <p:sp>
+        <p:nvSpPr>
+          <p:cNvPr id="2" name="Slide Image Placeholder 1"/>
+          <p:cNvSpPr>
+            <a:spLocks noGrp="1"/>
+          </p:cNvSpPr>
+          <p:nvPr>
+            <p:ph type="sldImg" idx="2"/>
+          </p:nvPr>
+        </p:nvSpPr>
+        <p:spPr/>
+      </p:sp>
+      <p:sp>
+        <p:nvSpPr>
+          <p:cNvPr id="3" name="Notes Placeholder 2"/>
+          <p:cNvSpPr>
+            <a:spLocks noGrp="1"/>
+          </p:cNvSpPr>
+          <p:nvPr>
+            <p:ph type="body" idx="3" sz="quarter"/>
+          </p:nvPr>
+        </p:nvSpPr>
+        <p:spPr/>
+        <p:txBody>
+          <a:bodyPr/>
+          <a:lstStyle/>
+          <a:p>
+            <a:r>
+              <a:t>Facilitation — the C2 practice; students assemble a short Deployment Report and run a feedback round.</a:t>
+            </a:r>
+          </a:p>
+          <a:p>
+            <a:r>
+              <a:t>Tell students, in these words: "For your practice build, assemble a short Deployment Report from the</a:t>
+            </a:r>
+          </a:p>
+          <a:p>
+            <a:r>
+              <a:t>evidence you captured — the build narrative, your configuration decisions, and your</a:t>
+            </a:r>
+          </a:p>
+          <a:p>
+            <a:r>
+              <a:t>test/troubleshooting evidence. Then seek feedback on it and respond."</a:t>
+            </a:r>
+          </a:p>
+          <a:p>
+            <a:r>
+              <a:t>Steps (put on the board):</a:t>
+            </a:r>
+          </a:p>
+          <a:p>
+            <a:r>
+              <a:t>1. Pull your captured screenshots and exports from Topics 6–9 into the report structure.</a:t>
+            </a:r>
+          </a:p>
+          <a:p>
+            <a:r>
+              <a:t>2. Write the build narrative + the configuration decisions; attach the test/troubleshooting evidence.</a:t>
+            </a:r>
+          </a:p>
+          <a:p>
+            <a:r>
+              <a:t>3. Swap with a peer (or ask the assessor-in-role) for feedback.</a:t>
+            </a:r>
+          </a:p>
+          <a:p>
+            <a:r>
+              <a:t>4. Respond: incorporate it, or defend a choice with reasons — and note what you did.</a:t>
+            </a:r>
+          </a:p>
+          <a:p>
+            <a:r>
+              <a:t>Must produce: a short assembled Deployment Report plus a recorded feedback exchange (what was raised,</a:t>
+            </a:r>
+          </a:p>
+          <a:p>
+            <a:r>
+              <a:t>how you responded) — the §7.5–7.6 evidence.</a:t>
+            </a:r>
+          </a:p>
+          <a:p>
+            <a:r>
+              <a:t>Timing: ~25 min. Where they get stuck: thin evidence (nothing captured earlier) — have them note the</a:t>
+            </a:r>
+          </a:p>
+          <a:p>
+            <a:r>
+              <a:t>gap rather than fabricate; and treating all feedback as mandatory changes — remind them defending with</a:t>
+            </a:r>
+          </a:p>
+          <a:p>
+            <a:r>
+              <a:t>reasons is valid.</a:t>
+            </a:r>
+          </a:p>
+          <a:p>
+            <a:r>
+              <a:t>Share-back prompt: "Name one piece of feedback you REJECTED and the reason you gave." (models</a:t>
+            </a:r>
+          </a:p>
+          <a:p>
+            <a:r>
+              <a:t>responding, not just complying).</a:t>
+            </a:r>
+          </a:p>
+          <a:p>
+            <a:r>
+              <a:t>No-leakage note: the practice build is comparable-not-identical to the AT2 build; keep them on the</a:t>
+            </a:r>
+          </a:p>
+          <a:p>
+            <a:r>
+              <a:t>practice report here.</a:t>
+            </a:r>
+          </a:p>
+        </p:txBody>
+      </p:sp>
+      <p:sp>
+        <p:nvSpPr>
+          <p:cNvPr id="4" name="Slide Number Placeholder 3"/>
+          <p:cNvSpPr>
+            <a:spLocks noGrp="1"/>
+          </p:cNvSpPr>
+          <p:nvPr>
+            <p:ph type="sldNum" idx="5" sz="quarter"/>
+          </p:nvPr>
+        </p:nvSpPr>
+        <p:spPr/>
+      </p:sp>
+    </p:spTree>
+  </p:cSld>
+  <p:clrMapOvr>
+    <a:masterClrMapping/>
+  </p:clrMapOvr>
+</p:notes>
+</file>
+
+<file path=ppt/notesSlides/notesSlide7.xml><?xml version="1.0" encoding="utf-8"?>
+<p:notes xmlns:a="http://schemas.openxmlformats.org/drawingml/2006/main" xmlns:p="http://schemas.openxmlformats.org/presentationml/2006/main" xmlns:r="http://schemas.openxmlformats.org/officeDocument/2006/relationships">
+  <p:cSld>
+    <p:spTree>
+      <p:nvGrpSpPr>
+        <p:cNvPr id="1" name=""/>
+        <p:cNvGrpSpPr/>
+        <p:nvPr/>
+      </p:nvGrpSpPr>
+      <p:grpSpPr>
+        <a:xfrm>
+          <a:off x="0" y="0"/>
+          <a:ext cx="0" cy="0"/>
+          <a:chOff x="0" y="0"/>
+          <a:chExt cx="0" cy="0"/>
+        </a:xfrm>
+      </p:grpSpPr>
+      <p:sp>
+        <p:nvSpPr>
+          <p:cNvPr id="2" name="Slide Image Placeholder 1"/>
+          <p:cNvSpPr>
+            <a:spLocks noGrp="1"/>
+          </p:cNvSpPr>
+          <p:nvPr>
+            <p:ph type="sldImg" idx="2"/>
+          </p:nvPr>
+        </p:nvSpPr>
+        <p:spPr/>
+      </p:sp>
+      <p:sp>
+        <p:nvSpPr>
+          <p:cNvPr id="3" name="Notes Placeholder 2"/>
+          <p:cNvSpPr>
+            <a:spLocks noGrp="1"/>
+          </p:cNvSpPr>
+          <p:nvPr>
+            <p:ph type="body" idx="3" sz="quarter"/>
+          </p:nvPr>
+        </p:nvSpPr>
+        <p:spPr/>
+        <p:txBody>
+          <a:bodyPr/>
+          <a:lstStyle/>
+          <a:p>
+            <a:r>
+              <a:t>Teach sign-off as the professional close — getting the build formally accepted against the approved</a:t>
+            </a:r>
+          </a:p>
+          <a:p>
+            <a:r>
+              <a:t>design, communicated clearly.</a:t>
+            </a:r>
+          </a:p>
+          <a:p>
+            <a:r>
+              <a:t>• First bullet: obtain final sign-off from the required personnel — the build closure and approval to</a:t>
+            </a:r>
+          </a:p>
+          <a:p>
+            <a:r>
+              <a:t>proceed. Sign-off is a decision by someone with authority, not a self-declaration.</a:t>
+            </a:r>
+          </a:p>
+          <a:p>
+            <a:r>
+              <a:t>• Second bullet (FS Oral): articulate the build and confirm requirements FOR THE AUDIENCE — plain</a:t>
+            </a:r>
+          </a:p>
+          <a:p>
+            <a:r>
+              <a:t>language, not jargon. The person signing may not be technical; meet them where they are.</a:t>
+            </a:r>
+          </a:p>
+          <a:p>
+            <a:r>
+              <a:t>• Third bullet (the point): sign-off closes AT2 — the build is accepted against the APPROVED DESIGN.</a:t>
+            </a:r>
+          </a:p>
+          <a:p>
+            <a:r>
+              <a:t>Tie it back to AT1: you're being accepted against the thing you designed and got approved.</a:t>
+            </a:r>
+          </a:p>
+          <a:p>
+            <a:r>
+              <a:t>Misconception to pre-empt: "sign-off is a formality once it works." No — it's where you CONFIRM every</a:t>
+            </a:r>
+          </a:p>
+          <a:p>
+            <a:r>
+              <a:t>requirement is met, in the client's language; a working build the client doesn't understand or accept</a:t>
+            </a:r>
+          </a:p>
+          <a:p>
+            <a:r>
+              <a:t>isn't signed off.</a:t>
+            </a:r>
+          </a:p>
+          <a:p>
+            <a:r>
+              <a:t>Question to pose: "You're walking a non-technical manager through the build for sign-off — how do you</a:t>
+            </a:r>
+          </a:p>
+          <a:p>
+            <a:r>
+              <a:t>say 'the alarm fires on queue depth' without the jargon?" (rehearses audience-appropriate articulation).</a:t>
+            </a:r>
+          </a:p>
+          <a:p>
+            <a:r>
+              <a:t>UoC/AT2 tie: ICTCLD503 PC 4.3 + ICTCLD505 PC 4.2 (obtain final sign-off) + FS Oral communication → AT2</a:t>
+            </a:r>
+          </a:p>
+          <a:p>
+            <a:r>
+              <a:t>§7.5–7.6 (D11).</a:t>
+            </a:r>
+          </a:p>
+        </p:txBody>
+      </p:sp>
+      <p:sp>
+        <p:nvSpPr>
+          <p:cNvPr id="4" name="Slide Number Placeholder 3"/>
+          <p:cNvSpPr>
+            <a:spLocks noGrp="1"/>
+          </p:cNvSpPr>
+          <p:nvPr>
+            <p:ph type="sldNum" idx="5" sz="quarter"/>
+          </p:nvPr>
+        </p:nvSpPr>
+        <p:spPr/>
+      </p:sp>
+    </p:spTree>
+  </p:cSld>
+  <p:clrMapOvr>
+    <a:masterClrMapping/>
+  </p:clrMapOvr>
+</p:notes>
+</file>
+
+<file path=ppt/notesSlides/notesSlide8.xml><?xml version="1.0" encoding="utf-8"?>
+<p:notes xmlns:a="http://schemas.openxmlformats.org/drawingml/2006/main" xmlns:p="http://schemas.openxmlformats.org/presentationml/2006/main" xmlns:r="http://schemas.openxmlformats.org/officeDocument/2006/relationships">
+  <p:cSld>
+    <p:spTree>
+      <p:nvGrpSpPr>
+        <p:cNvPr id="1" name=""/>
+        <p:cNvGrpSpPr/>
+        <p:nvPr/>
+      </p:nvGrpSpPr>
+      <p:grpSpPr>
+        <a:xfrm>
+          <a:off x="0" y="0"/>
+          <a:ext cx="0" cy="0"/>
+          <a:chOff x="0" y="0"/>
+          <a:chExt cx="0" cy="0"/>
+        </a:xfrm>
+      </p:grpSpPr>
+      <p:sp>
+        <p:nvSpPr>
+          <p:cNvPr id="2" name="Slide Image Placeholder 1"/>
+          <p:cNvSpPr>
+            <a:spLocks noGrp="1"/>
+          </p:cNvSpPr>
+          <p:nvPr>
+            <p:ph type="sldImg" idx="2"/>
+          </p:nvPr>
+        </p:nvSpPr>
+        <p:spPr/>
+      </p:sp>
+      <p:sp>
+        <p:nvSpPr>
+          <p:cNvPr id="3" name="Notes Placeholder 2"/>
+          <p:cNvSpPr>
+            <a:spLocks noGrp="1"/>
+          </p:cNvSpPr>
+          <p:nvPr>
+            <p:ph type="body" idx="3" sz="quarter"/>
+          </p:nvPr>
+        </p:nvSpPr>
+        <p:spPr/>
+        <p:txBody>
+          <a:bodyPr/>
+          <a:lstStyle/>
+          <a:p>
+            <a:r>
+              <a:t>Facilitation — the C3 practice; students REHEARSE the sign-off conversation (oral-communication</a:t>
+            </a:r>
+          </a:p>
+          <a:p>
+            <a:r>
+              <a:t>practice, not a document).</a:t>
+            </a:r>
+          </a:p>
+          <a:p>
+            <a:r>
+              <a:t>Tell students, in these words: "For your practice build, rehearse the sign-off conversation — walk your</a:t>
+            </a:r>
+          </a:p>
+          <a:p>
+            <a:r>
+              <a:t>report, confirm each requirement is met, and obtain acceptance — in plain language for a non-technical</a:t>
+            </a:r>
+          </a:p>
+          <a:p>
+            <a:r>
+              <a:t>audience."</a:t>
+            </a:r>
+          </a:p>
+          <a:p>
+            <a:r>
+              <a:t>Steps (pair them up):</a:t>
+            </a:r>
+          </a:p>
+          <a:p>
+            <a:r>
+              <a:t>1. Pair up — one is the consultant, one is the client/required-personnel signing off (then swap).</a:t>
+            </a:r>
+          </a:p>
+          <a:p>
+            <a:r>
+              <a:t>2. Walk the report: what was built, how it meets each requirement, briefly and jargon-free.</a:t>
+            </a:r>
+          </a:p>
+          <a:p>
+            <a:r>
+              <a:t>3. Confirm requirements met; the 'client' asks a question or two; obtain acceptance.</a:t>
+            </a:r>
+          </a:p>
+          <a:p>
+            <a:r>
+              <a:t>Must produce: a rehearsed sign-off walkthrough where the 'client' can restate what they're accepting —</a:t>
+            </a:r>
+          </a:p>
+          <a:p>
+            <a:r>
+              <a:t>practice for the §7.6 sign-off.</a:t>
+            </a:r>
+          </a:p>
+          <a:p>
+            <a:r>
+              <a:t>Timing: ~15 min (short — it's a rehearsal). Where they get stuck: slipping into jargon — the 'client'</a:t>
+            </a:r>
+          </a:p>
+          <a:p>
+            <a:r>
+              <a:t>should stop them and ask "in plain words?"; and skipping the requirement-by-requirement confirmation.</a:t>
+            </a:r>
+          </a:p>
+          <a:p>
+            <a:r>
+              <a:t>Share-back prompt: ask one pair to demo 60 seconds — the room judges whether a non-technical client</a:t>
+            </a:r>
+          </a:p>
+          <a:p>
+            <a:r>
+              <a:t>would understand.</a:t>
+            </a:r>
+          </a:p>
+          <a:p>
+            <a:r>
+              <a:t>No-leakage note: the practice build is comparable-not-identical to the AT2 build; keep the rehearsal on</a:t>
+            </a:r>
+          </a:p>
+          <a:p>
+            <a:r>
+              <a:t>the practice build here.</a:t>
+            </a:r>
+          </a:p>
+        </p:txBody>
+      </p:sp>
+      <p:sp>
+        <p:nvSpPr>
+          <p:cNvPr id="4" name="Slide Number Placeholder 3"/>
+          <p:cNvSpPr>
+            <a:spLocks noGrp="1"/>
+          </p:cNvSpPr>
+          <p:nvPr>
+            <p:ph type="sldNum" idx="5" sz="quarter"/>
+          </p:nvPr>
+        </p:nvSpPr>
+        <p:spPr/>
+      </p:sp>
+    </p:spTree>
+  </p:cSld>
+  <p:clrMapOvr>
+    <a:masterClrMapping/>
+  </p:clrMapOvr>
+</p:notes>
+</file>
+
+<file path=ppt/notesSlides/notesSlide9.xml><?xml version="1.0" encoding="utf-8"?>
+<p:notes xmlns:a="http://schemas.openxmlformats.org/drawingml/2006/main" xmlns:p="http://schemas.openxmlformats.org/presentationml/2006/main" xmlns:r="http://schemas.openxmlformats.org/officeDocument/2006/relationships">
+  <p:cSld>
+    <p:spTree>
+      <p:nvGrpSpPr>
+        <p:cNvPr id="1" name=""/>
+        <p:cNvGrpSpPr/>
+        <p:nvPr/>
+      </p:nvGrpSpPr>
+      <p:grpSpPr>
+        <a:xfrm>
+          <a:off x="0" y="0"/>
+          <a:ext cx="0" cy="0"/>
+          <a:chOff x="0" y="0"/>
+          <a:chExt cx="0" cy="0"/>
+        </a:xfrm>
+      </p:grpSpPr>
+      <p:sp>
+        <p:nvSpPr>
+          <p:cNvPr id="2" name="Slide Image Placeholder 1"/>
+          <p:cNvSpPr>
+            <a:spLocks noGrp="1"/>
+          </p:cNvSpPr>
+          <p:nvPr>
+            <p:ph type="sldImg" idx="2"/>
+          </p:nvPr>
+        </p:nvSpPr>
+        <p:spPr/>
+      </p:sp>
+      <p:sp>
+        <p:nvSpPr>
+          <p:cNvPr id="3" name="Notes Placeholder 2"/>
+          <p:cNvSpPr>
+            <a:spLocks noGrp="1"/>
+          </p:cNvSpPr>
+          <p:nvPr>
+            <p:ph type="body" idx="3" sz="quarter"/>
+          </p:nvPr>
+        </p:nvSpPr>
+        <p:spPr/>
+        <p:txBody>
+          <a:bodyPr/>
+          <a:lstStyle/>
+          <a:p>
+            <a:r>
+              <a:t>Teach the KE appendix as re-evidencing knowledge CONTEXTUALLY — against their own build, not as</a:t>
+            </a:r>
+          </a:p>
+          <a:p>
+            <a:r>
+              <a:t>textbook definitions. This is the last piece of the submission.</a:t>
+            </a:r>
+          </a:p>
+          <a:p>
+            <a:r>
+              <a:t>• First bullet: contextual written responses on THEIR OWN build — IaC concepts and benefits,</a:t>
+            </a:r>
+          </a:p>
+          <a:p>
+            <a:r>
+              <a:t>testing/debugging, and the shared cloud foundations. The prompts ask "on your build," not "define X."</a:t>
+            </a:r>
+          </a:p>
+          <a:p>
+            <a:r>
+              <a:t>• Second bullet (the shift): re-evidences the knowledge from Topics 6–9 against what they ACTUALLY</a:t>
+            </a:r>
+          </a:p>
+          <a:p>
+            <a:r>
+              <a:t>built — a generic definition scores less than one grounded in their template, their tests, their fixes.</a:t>
+            </a:r>
+          </a:p>
+          <a:p>
+            <a:r>
+              <a:t>• Third bullet: assembled into the report's KE APPENDIX — the final component of the AT2 submission.</a:t>
+            </a:r>
+          </a:p>
+          <a:p>
+            <a:r>
+              <a:t>Misconception to pre-empt: "I'll paste the definitions from the notes." No — the KE responses are</a:t>
+            </a:r>
+          </a:p>
+          <a:p>
+            <a:r>
+              <a:t>marked as CONTEXTUAL (D12); "here's how least-privilege showed up in MY build" beats a dictionary entry.</a:t>
+            </a:r>
+          </a:p>
+          <a:p>
+            <a:r>
+              <a:t>Question to pose: "The KE asks about testing techniques — do you answer with the textbook, or with how</a:t>
+            </a:r>
+          </a:p>
+          <a:p>
+            <a:r>
+              <a:t>you tested YOUR microservice?" (your build — contextual is the whole point).</a:t>
+            </a:r>
+          </a:p>
+          <a:p>
+            <a:r>
+              <a:t>UoC/AT2 tie: ICTCLD505 KE 3–9 + ICTCLD503 KE 5 + the shared foundations (ICTCLD503 KE 1,2 / ICTCLD505</a:t>
+            </a:r>
+          </a:p>
+          <a:p>
+            <a:r>
+              <a:t>KE 1,2), re-evidenced against the build → AT2 §8 (D12). This slide deliberately re-evidences the</a:t>
+            </a:r>
+          </a:p>
+          <a:p>
+            <a:r>
+              <a:t>Topics 6–9 KEs — the advisory EXTRA is by design.</a:t>
+            </a:r>
+          </a:p>
+        </p:txBody>
+      </p:sp>
+      <p:sp>
+        <p:nvSpPr>
+          <p:cNvPr id="4" name="Slide Number Placeholder 3"/>
+          <p:cNvSpPr>
+            <a:spLocks noGrp="1"/>
+          </p:cNvSpPr>
+          <p:nvPr>
+            <p:ph type="sldNum" idx="5" sz="quarter"/>
+          </p:nvPr>
+        </p:nvSpPr>
+        <p:spPr/>
+      </p:sp>
+    </p:spTree>
+  </p:cSld>
+  <p:clrMapOvr>
+    <a:masterClrMapping/>
+  </p:clrMapOvr>
+</p:notes>
 </file>
 
 <file path=ppt/slideLayouts/slideLayout1.xml><?xml version="1.0" encoding="utf-8"?>
@@ -9449,4 +11219,324 @@
   </a:objectDefaults>
   <a:extraClrSchemeLst/>
 </a:theme>
+</file>
+
+<file path=ppt/theme/theme2.xml><?xml version="1.0" encoding="utf-8"?>
+<a:theme xmlns:a="http://schemas.openxmlformats.org/drawingml/2006/main" name="Office Theme">
+  <a:themeElements>
+    <a:clrScheme name="Office">
+      <a:dk1>
+        <a:sysClr val="windowText" lastClr="000000"/>
+      </a:dk1>
+      <a:lt1>
+        <a:sysClr val="window" lastClr="FFFFFF"/>
+      </a:lt1>
+      <a:dk2>
+        <a:srgbClr val="1F497D"/>
+      </a:dk2>
+      <a:lt2>
+        <a:srgbClr val="EEECE1"/>
+      </a:lt2>
+      <a:accent1>
+        <a:srgbClr val="4F81BD"/>
+      </a:accent1>
+      <a:accent2>
+        <a:srgbClr val="C0504D"/>
+      </a:accent2>
+      <a:accent3>
+        <a:srgbClr val="9BBB59"/>
+      </a:accent3>
+      <a:accent4>
+        <a:srgbClr val="8064A2"/>
+      </a:accent4>
+      <a:accent5>
+        <a:srgbClr val="4BACC6"/>
+      </a:accent5>
+      <a:accent6>
+        <a:srgbClr val="F79646"/>
+      </a:accent6>
+      <a:hlink>
+        <a:srgbClr val="0000FF"/>
+      </a:hlink>
+      <a:folHlink>
+        <a:srgbClr val="800080"/>
+      </a:folHlink>
+    </a:clrScheme>
+    <a:fontScheme name="Office">
+      <a:majorFont>
+        <a:latin typeface="Calibri"/>
+        <a:ea typeface=""/>
+        <a:cs typeface=""/>
+        <a:font script="Jpan" typeface="ＭＳ Ｐゴシック"/>
+        <a:font script="Hang" typeface="맑은 고딕"/>
+        <a:font script="Hans" typeface="宋体"/>
+        <a:font script="Hant" typeface="新細明體"/>
+        <a:font script="Arab" typeface="Times New Roman"/>
+        <a:font script="Hebr" typeface="Times New Roman"/>
+        <a:font script="Thai" typeface="Angsana New"/>
+        <a:font script="Ethi" typeface="Nyala"/>
+        <a:font script="Beng" typeface="Vrinda"/>
+        <a:font script="Gujr" typeface="Shruti"/>
+        <a:font script="Khmr" typeface="MoolBoran"/>
+        <a:font script="Knda" typeface="Tunga"/>
+        <a:font script="Guru" typeface="Raavi"/>
+        <a:font script="Cans" typeface="Euphemia"/>
+        <a:font script="Cher" typeface="Plantagenet Cherokee"/>
+        <a:font script="Yiii" typeface="Microsoft Yi Baiti"/>
+        <a:font script="Tibt" typeface="Microsoft Himalaya"/>
+        <a:font script="Thaa" typeface="MV Boli"/>
+        <a:font script="Deva" typeface="Mangal"/>
+        <a:font script="Telu" typeface="Gautami"/>
+        <a:font script="Taml" typeface="Latha"/>
+        <a:font script="Syrc" typeface="Estrangelo Edessa"/>
+        <a:font script="Orya" typeface="Kalinga"/>
+        <a:font script="Mlym" typeface="Kartika"/>
+        <a:font script="Laoo" typeface="DokChampa"/>
+        <a:font script="Sinh" typeface="Iskoola Pota"/>
+        <a:font script="Mong" typeface="Mongolian Baiti"/>
+        <a:font script="Viet" typeface="Times New Roman"/>
+        <a:font script="Uigh" typeface="Microsoft Uighur"/>
+        <a:font script="Geor" typeface="Sylfaen"/>
+      </a:majorFont>
+      <a:minorFont>
+        <a:latin typeface="Calibri"/>
+        <a:ea typeface=""/>
+        <a:cs typeface=""/>
+        <a:font script="Jpan" typeface="ＭＳ Ｐゴシック"/>
+        <a:font script="Hang" typeface="맑은 고딕"/>
+        <a:font script="Hans" typeface="宋体"/>
+        <a:font script="Hant" typeface="新細明體"/>
+        <a:font script="Arab" typeface="Arial"/>
+        <a:font script="Hebr" typeface="Arial"/>
+        <a:font script="Thai" typeface="Cordia New"/>
+        <a:font script="Ethi" typeface="Nyala"/>
+        <a:font script="Beng" typeface="Vrinda"/>
+        <a:font script="Gujr" typeface="Shruti"/>
+        <a:font script="Khmr" typeface="DaunPenh"/>
+        <a:font script="Knda" typeface="Tunga"/>
+        <a:font script="Guru" typeface="Raavi"/>
+        <a:font script="Cans" typeface="Euphemia"/>
+        <a:font script="Cher" typeface="Plantagenet Cherokee"/>
+        <a:font script="Yiii" typeface="Microsoft Yi Baiti"/>
+        <a:font script="Tibt" typeface="Microsoft Himalaya"/>
+        <a:font script="Thaa" typeface="MV Boli"/>
+        <a:font script="Deva" typeface="Mangal"/>
+        <a:font script="Telu" typeface="Gautami"/>
+        <a:font script="Taml" typeface="Latha"/>
+        <a:font script="Syrc" typeface="Estrangelo Edessa"/>
+        <a:font script="Orya" typeface="Kalinga"/>
+        <a:font script="Mlym" typeface="Kartika"/>
+        <a:font script="Laoo" typeface="DokChampa"/>
+        <a:font script="Sinh" typeface="Iskoola Pota"/>
+        <a:font script="Mong" typeface="Mongolian Baiti"/>
+        <a:font script="Viet" typeface="Arial"/>
+        <a:font script="Uigh" typeface="Microsoft Uighur"/>
+        <a:font script="Geor" typeface="Sylfaen"/>
+      </a:minorFont>
+    </a:fontScheme>
+    <a:fmtScheme name="Office">
+      <a:fillStyleLst>
+        <a:solidFill>
+          <a:schemeClr val="phClr"/>
+        </a:solidFill>
+        <a:gradFill rotWithShape="1">
+          <a:gsLst>
+            <a:gs pos="0">
+              <a:schemeClr val="phClr">
+                <a:tint val="50000"/>
+                <a:satMod val="300000"/>
+              </a:schemeClr>
+            </a:gs>
+            <a:gs pos="35000">
+              <a:schemeClr val="phClr">
+                <a:tint val="37000"/>
+                <a:satMod val="300000"/>
+              </a:schemeClr>
+            </a:gs>
+            <a:gs pos="100000">
+              <a:schemeClr val="phClr">
+                <a:tint val="15000"/>
+                <a:satMod val="350000"/>
+              </a:schemeClr>
+            </a:gs>
+          </a:gsLst>
+          <a:lin ang="16200000" scaled="1"/>
+        </a:gradFill>
+        <a:gradFill rotWithShape="1">
+          <a:gsLst>
+            <a:gs pos="0">
+              <a:schemeClr val="phClr">
+                <a:tint val="100000"/>
+                <a:shade val="100000"/>
+                <a:satMod val="130000"/>
+              </a:schemeClr>
+            </a:gs>
+            <a:gs pos="100000">
+              <a:schemeClr val="phClr">
+                <a:tint val="50000"/>
+                <a:shade val="100000"/>
+                <a:satMod val="350000"/>
+              </a:schemeClr>
+            </a:gs>
+          </a:gsLst>
+          <a:lin ang="16200000" scaled="0"/>
+        </a:gradFill>
+      </a:fillStyleLst>
+      <a:lnStyleLst>
+        <a:ln w="9525" cap="flat" cmpd="sng" algn="ctr">
+          <a:solidFill>
+            <a:schemeClr val="phClr">
+              <a:shade val="95000"/>
+              <a:satMod val="105000"/>
+            </a:schemeClr>
+          </a:solidFill>
+          <a:prstDash val="solid"/>
+        </a:ln>
+        <a:ln w="25400" cap="flat" cmpd="sng" algn="ctr">
+          <a:solidFill>
+            <a:schemeClr val="phClr"/>
+          </a:solidFill>
+          <a:prstDash val="solid"/>
+        </a:ln>
+        <a:ln w="38100" cap="flat" cmpd="sng" algn="ctr">
+          <a:solidFill>
+            <a:schemeClr val="phClr"/>
+          </a:solidFill>
+          <a:prstDash val="solid"/>
+        </a:ln>
+      </a:lnStyleLst>
+      <a:effectStyleLst>
+        <a:effectStyle>
+          <a:effectLst>
+            <a:outerShdw blurRad="40000" dist="20000" dir="5400000" rotWithShape="0">
+              <a:srgbClr val="000000">
+                <a:alpha val="38000"/>
+              </a:srgbClr>
+            </a:outerShdw>
+          </a:effectLst>
+        </a:effectStyle>
+        <a:effectStyle>
+          <a:effectLst>
+            <a:outerShdw blurRad="40000" dist="23000" dir="5400000" rotWithShape="0">
+              <a:srgbClr val="000000">
+                <a:alpha val="35000"/>
+              </a:srgbClr>
+            </a:outerShdw>
+          </a:effectLst>
+        </a:effectStyle>
+        <a:effectStyle>
+          <a:effectLst>
+            <a:outerShdw blurRad="40000" dist="23000" dir="5400000" rotWithShape="0">
+              <a:srgbClr val="000000">
+                <a:alpha val="35000"/>
+              </a:srgbClr>
+            </a:outerShdw>
+          </a:effectLst>
+          <a:scene3d>
+            <a:camera prst="orthographicFront">
+              <a:rot lat="0" lon="0" rev="0"/>
+            </a:camera>
+            <a:lightRig rig="threePt" dir="t">
+              <a:rot lat="0" lon="0" rev="1200000"/>
+            </a:lightRig>
+          </a:scene3d>
+          <a:sp3d>
+            <a:bevelT w="63500" h="25400"/>
+          </a:sp3d>
+        </a:effectStyle>
+      </a:effectStyleLst>
+      <a:bgFillStyleLst>
+        <a:solidFill>
+          <a:schemeClr val="phClr"/>
+        </a:solidFill>
+        <a:gradFill rotWithShape="1">
+          <a:gsLst>
+            <a:gs pos="0">
+              <a:schemeClr val="phClr">
+                <a:tint val="40000"/>
+                <a:satMod val="350000"/>
+              </a:schemeClr>
+            </a:gs>
+            <a:gs pos="40000">
+              <a:schemeClr val="phClr">
+                <a:tint val="45000"/>
+                <a:shade val="99000"/>
+                <a:satMod val="350000"/>
+              </a:schemeClr>
+            </a:gs>
+            <a:gs pos="100000">
+              <a:schemeClr val="phClr">
+                <a:shade val="20000"/>
+                <a:satMod val="255000"/>
+              </a:schemeClr>
+            </a:gs>
+          </a:gsLst>
+          <a:path path="circle">
+            <a:fillToRect l="50000" t="-80000" r="50000" b="180000"/>
+          </a:path>
+        </a:gradFill>
+        <a:gradFill rotWithShape="1">
+          <a:gsLst>
+            <a:gs pos="0">
+              <a:schemeClr val="phClr">
+                <a:tint val="80000"/>
+                <a:satMod val="300000"/>
+              </a:schemeClr>
+            </a:gs>
+            <a:gs pos="100000">
+              <a:schemeClr val="phClr">
+                <a:shade val="30000"/>
+                <a:satMod val="200000"/>
+              </a:schemeClr>
+            </a:gs>
+          </a:gsLst>
+          <a:path path="circle">
+            <a:fillToRect l="50000" t="50000" r="50000" b="50000"/>
+          </a:path>
+        </a:gradFill>
+      </a:bgFillStyleLst>
+    </a:fmtScheme>
+  </a:themeElements>
+  <a:objectDefaults>
+    <a:spDef>
+      <a:spPr/>
+      <a:bodyPr/>
+      <a:lstStyle/>
+      <a:style>
+        <a:lnRef idx="1">
+          <a:schemeClr val="accent1"/>
+        </a:lnRef>
+        <a:fillRef idx="3">
+          <a:schemeClr val="accent1"/>
+        </a:fillRef>
+        <a:effectRef idx="2">
+          <a:schemeClr val="accent1"/>
+        </a:effectRef>
+        <a:fontRef idx="minor">
+          <a:schemeClr val="lt1"/>
+        </a:fontRef>
+      </a:style>
+    </a:spDef>
+    <a:lnDef>
+      <a:spPr/>
+      <a:bodyPr/>
+      <a:lstStyle/>
+      <a:style>
+        <a:lnRef idx="2">
+          <a:schemeClr val="accent1"/>
+        </a:lnRef>
+        <a:fillRef idx="0">
+          <a:schemeClr val="accent1"/>
+        </a:fillRef>
+        <a:effectRef idx="1">
+          <a:schemeClr val="accent1"/>
+        </a:effectRef>
+        <a:fontRef idx="minor">
+          <a:schemeClr val="tx1"/>
+        </a:fontRef>
+      </a:style>
+    </a:lnDef>
+  </a:objectDefaults>
+  <a:extraClrSchemeLst/>
+</a:theme>
 </file>